--- a/decks/geog-urban/geog-urban_ch2_rio-opportunities.pptx
+++ b/decks/geog-urban/geog-urban_ch2_rio-opportunities.pptx
@@ -126,30 +126,30 @@
   <p:extLst>
     <p:ext uri="{521415D9-36F7-43E2-AB2F-B90AF26B5E84}">
       <p14:sectionLst xmlns:p14="http://schemas.microsoft.com/office/powerpoint/2010/main">
-        <p14:section name="Opening" id="{3ee25cc1-319f-ba1b-8fd7-6006fa75bf93}">
+        <p14:section name="Opening" id="{e3c2217b-a0d2-fcf7-1b36-137507f142ea}">
           <p14:sldIdLst>
             <p14:sldId id="256"/>
           </p14:sldIdLst>
         </p14:section>
-        <p14:section name="Gate" id="{6e10a434-a305-b0dd-5ed6-fd9212f9b941}">
+        <p14:section name="Gate" id="{e50e23c1-c0f1-a362-30aa-f703da08f9a8}">
           <p14:sldIdLst>
             <p14:sldId id="257"/>
             <p14:sldId id="258"/>
           </p14:sldIdLst>
         </p14:section>
-        <p14:section name="Pre-teach" id="{22fcd635-2291-5491-9589-6b17b3f7dad2}">
+        <p14:section name="Pre-teach" id="{71bfca86-4a2e-93af-003e-87226698a1a3}">
           <p14:sldIdLst>
             <p14:sldId id="259"/>
             <p14:sldId id="260"/>
           </p14:sldIdLst>
         </p14:section>
-        <p14:section name="Read-along" id="{843a36cb-4954-887f-3a3c-8bb69cb84b6c}">
+        <p14:section name="Read-along" id="{48d80f61-be48-3ff6-2e06-2a32e181b47e}">
           <p14:sldIdLst>
             <p14:sldId id="261"/>
             <p14:sldId id="262"/>
           </p14:sldIdLst>
         </p14:section>
-        <p14:section name="Teach" id="{770d3f47-2474-af3d-3734-2a3c37193746}">
+        <p14:section name="Teach" id="{fa2bfcca-f5db-304f-9b30-ab5d90f108b1}">
           <p14:sldIdLst>
             <p14:sldId id="263"/>
             <p14:sldId id="264"/>
@@ -158,7 +158,7 @@
             <p14:sldId id="267"/>
           </p14:sldIdLst>
         </p14:section>
-        <p14:section name="Routes" id="{3f15735e-57d4-9f2b-d701-c497edfe77d3}">
+        <p14:section name="Routes" id="{4f048e48-8f85-6c06-961d-86d2c11d7ae4}">
           <p14:sldIdLst>
             <p14:sldId id="268"/>
             <p14:sldId id="269"/>
@@ -166,12 +166,12 @@
             <p14:sldId id="271"/>
           </p14:sldIdLst>
         </p14:section>
-        <p14:section name="Close" id="{ecc9dc48-b72a-1cc7-4fcf-8ac2c00710c4}">
+        <p14:section name="Close" id="{8d55d1cd-1125-3bee-5032-b0a6d3908e66}">
           <p14:sldIdLst>
             <p14:sldId id="272"/>
           </p14:sldIdLst>
         </p14:section>
-        <p14:section name="Answers" id="{6e858e87-2189-248b-ea9d-2655c1a93867}">
+        <p14:section name="Answers" id="{80953bf6-2b2f-1a5f-8081-3e6805584664}">
           <p14:sldIdLst>
             <p14:sldId id="273"/>
             <p14:sldId id="274"/>
@@ -2255,7 +2255,7 @@
               <a:rPr lang="en-US" dirty="0"/>
               <a:t>Teach — Where is Rio, and why has it grown?. Say it in your own words, then check understanding with a quick question: ask a pupil from the pre-teach group first, since they met these words and ideas before the lesson. Pupils try to recall before you re-explain.
 When an exam asks you to describe the location of a city, work from large to small. Rio de Janeiro is in South America. It is on the south-eastern coast of Brazil, next to the Atlantic Ocean, and it lies just north of the Tropic of Capricorn. Use compass directions and the names of the ocean, the country and the continent, and you have a full-mark description.
-Brazil is an NEE, a newly emerging economy: a country that is industrialising quickly and getting richer, but where many people are still poor. Rio has grown for the two reasons you met in chapter 1. The first is rural to urban migration: people leave Amazonia and the drought-hit areas of north-east Brazil in the hope of finding a better life in Brazil's main cities. Drought and a lack of work are push factors; jobs and services in Rio are pull factors. The second is natural increase, because a city of young migrants has far more births than deaths.
+Brazil is an NEE, a newly emerging economy: a country that is industrialising quickly and getting richer, but where many people are still poor. Rio has grown for the two reasons you met in chapter 1. The first is rural to urban migration: people leave Amazonia and the drought-hit areas of north-east Brazil hoping for a better life in one of Brazil's big cities. Drought and a lack of work are push factors; jobs and services in Rio are pull factors. The second is natural increase, because a city of young migrants has far more births than deaths.
 Tip: Describe the location in three steps: continent, country and coast, then a line of latitude or a nearby ocean.</a:t>
             </a:r>
             <a:endParaRPr lang="en-US" dirty="0"/>
